--- a/examples/revisao-de-portfolio.pptx
+++ b/examples/revisao-de-portfolio.pptx
@@ -3688,6 +3688,41 @@
         </p:nvSpPr>
         <p:spPr>
           <a:xfrm>
+            <a:off x="731520" y="5669280"/>
+            <a:ext cx="10698480" cy="457200"/>
+          </a:xfrm>
+          <a:prstGeom prst="rect">
+            <a:avLst/>
+          </a:prstGeom>
+          <a:noFill/>
+        </p:spPr>
+        <p:txBody>
+          <a:bodyPr wrap="square" anchor="t" lIns="45720" rIns="45720" tIns="27432" bIns="27432">
+            <a:spAutoFit/>
+          </a:bodyPr>
+          <a:lstStyle/>
+          <a:p>
+            <a:pPr algn="l"/>
+            <a:r>
+              <a:rPr sz="1300" b="0" i="0">
+                <a:solidFill>
+                  <a:srgbClr val="BFC9D4"/>
+                </a:solidFill>
+                <a:latin typeface="Arial"/>
+              </a:rPr>
+              <a:t>Uso interno</a:t>
+            </a:r>
+          </a:p>
+        </p:txBody>
+      </p:sp>
+      <p:sp>
+        <p:nvSpPr>
+          <p:cNvPr id="12" name="TextBox 11"/>
+          <p:cNvSpPr txBox="1"/>
+          <p:nvPr/>
+        </p:nvSpPr>
+        <p:spPr>
+          <a:xfrm>
             <a:off x="9418320" y="457200"/>
             <a:ext cx="1371600" cy="365760"/>
           </a:xfrm>
@@ -3866,7 +3901,7 @@
                 </a:solidFill>
                 <a:latin typeface="Arial"/>
               </a:rPr>
-              <a:t>Fonte: Base de portfólio, set/2026</a:t>
+              <a:t>Fonte: Base de portfólio, set/2026   |   Uso interno</a:t>
             </a:r>
           </a:p>
         </p:txBody>
@@ -5035,8 +5070,8 @@
         </p:nvSpPr>
         <p:spPr>
           <a:xfrm>
-            <a:off x="10817352" y="6217920"/>
-            <a:ext cx="914400" cy="365760"/>
+            <a:off x="457200" y="6217920"/>
+            <a:ext cx="8531352" cy="365760"/>
           </a:xfrm>
           <a:prstGeom prst="rect">
             <a:avLst/>
@@ -5049,6 +5084,41 @@
           </a:bodyPr>
           <a:lstStyle/>
           <a:p>
+            <a:pPr algn="l"/>
+            <a:r>
+              <a:rPr sz="1000" b="0" i="0">
+                <a:solidFill>
+                  <a:srgbClr val="7F7F7F"/>
+                </a:solidFill>
+                <a:latin typeface="Arial"/>
+              </a:rPr>
+              <a:t>Uso interno</a:t>
+            </a:r>
+          </a:p>
+        </p:txBody>
+      </p:sp>
+      <p:sp>
+        <p:nvSpPr>
+          <p:cNvPr id="6" name="TextBox 5"/>
+          <p:cNvSpPr txBox="1"/>
+          <p:nvPr/>
+        </p:nvSpPr>
+        <p:spPr>
+          <a:xfrm>
+            <a:off x="10817352" y="6217920"/>
+            <a:ext cx="914400" cy="365760"/>
+          </a:xfrm>
+          <a:prstGeom prst="rect">
+            <a:avLst/>
+          </a:prstGeom>
+          <a:noFill/>
+        </p:spPr>
+        <p:txBody>
+          <a:bodyPr wrap="square" anchor="ctr" lIns="45720" rIns="45720" tIns="27432" bIns="27432">
+            <a:spAutoFit/>
+          </a:bodyPr>
+          <a:lstStyle/>
+          <a:p>
             <a:pPr algn="r"/>
             <a:r>
               <a:rPr sz="1000" b="0" i="0">
@@ -5064,7 +5134,7 @@
       </p:sp>
       <p:sp>
         <p:nvSpPr>
-          <p:cNvPr id="6" name="TextBox 5"/>
+          <p:cNvPr id="7" name="TextBox 6"/>
           <p:cNvSpPr txBox="1"/>
           <p:nvPr/>
         </p:nvSpPr>
@@ -5099,7 +5169,7 @@
       </p:sp>
       <p:sp>
         <p:nvSpPr>
-          <p:cNvPr id="7" name="TextBox 6"/>
+          <p:cNvPr id="8" name="TextBox 7"/>
           <p:cNvSpPr txBox="1"/>
           <p:nvPr/>
         </p:nvSpPr>
@@ -5134,7 +5204,7 @@
       </p:sp>
       <p:sp>
         <p:nvSpPr>
-          <p:cNvPr id="8" name="Rectangle 7"/>
+          <p:cNvPr id="9" name="Rectangle 8"/>
           <p:cNvSpPr/>
           <p:nvPr/>
         </p:nvSpPr>
@@ -5178,7 +5248,7 @@
       </p:sp>
       <p:sp>
         <p:nvSpPr>
-          <p:cNvPr id="9" name="Rectangle 8"/>
+          <p:cNvPr id="10" name="Rectangle 9"/>
           <p:cNvSpPr/>
           <p:nvPr/>
         </p:nvSpPr>
@@ -5222,7 +5292,7 @@
       </p:sp>
       <p:sp>
         <p:nvSpPr>
-          <p:cNvPr id="10" name="TextBox 9"/>
+          <p:cNvPr id="11" name="TextBox 10"/>
           <p:cNvSpPr txBox="1"/>
           <p:nvPr/>
         </p:nvSpPr>
@@ -5257,7 +5327,7 @@
       </p:sp>
       <p:sp>
         <p:nvSpPr>
-          <p:cNvPr id="11" name="TextBox 10"/>
+          <p:cNvPr id="12" name="TextBox 11"/>
           <p:cNvSpPr txBox="1"/>
           <p:nvPr/>
         </p:nvSpPr>
@@ -5292,7 +5362,7 @@
       </p:sp>
       <p:sp>
         <p:nvSpPr>
-          <p:cNvPr id="12" name="Rectangle 11"/>
+          <p:cNvPr id="13" name="Rectangle 12"/>
           <p:cNvSpPr/>
           <p:nvPr/>
         </p:nvSpPr>
@@ -5336,7 +5406,7 @@
       </p:sp>
       <p:sp>
         <p:nvSpPr>
-          <p:cNvPr id="13" name="Rectangle 12"/>
+          <p:cNvPr id="14" name="Rectangle 13"/>
           <p:cNvSpPr/>
           <p:nvPr/>
         </p:nvSpPr>
@@ -5380,7 +5450,7 @@
       </p:sp>
       <p:sp>
         <p:nvSpPr>
-          <p:cNvPr id="14" name="TextBox 13"/>
+          <p:cNvPr id="15" name="TextBox 14"/>
           <p:cNvSpPr txBox="1"/>
           <p:nvPr/>
         </p:nvSpPr>
@@ -5415,7 +5485,7 @@
       </p:sp>
       <p:sp>
         <p:nvSpPr>
-          <p:cNvPr id="15" name="TextBox 14"/>
+          <p:cNvPr id="16" name="TextBox 15"/>
           <p:cNvSpPr txBox="1"/>
           <p:nvPr/>
         </p:nvSpPr>
@@ -5450,7 +5520,7 @@
       </p:sp>
       <p:sp>
         <p:nvSpPr>
-          <p:cNvPr id="16" name="Rectangle 15"/>
+          <p:cNvPr id="17" name="Rectangle 16"/>
           <p:cNvSpPr/>
           <p:nvPr/>
         </p:nvSpPr>
@@ -5494,7 +5564,7 @@
       </p:sp>
       <p:sp>
         <p:nvSpPr>
-          <p:cNvPr id="17" name="Rectangle 16"/>
+          <p:cNvPr id="18" name="Rectangle 17"/>
           <p:cNvSpPr/>
           <p:nvPr/>
         </p:nvSpPr>
@@ -5538,7 +5608,7 @@
       </p:sp>
       <p:sp>
         <p:nvSpPr>
-          <p:cNvPr id="18" name="TextBox 17"/>
+          <p:cNvPr id="19" name="TextBox 18"/>
           <p:cNvSpPr txBox="1"/>
           <p:nvPr/>
         </p:nvSpPr>
@@ -5573,7 +5643,7 @@
       </p:sp>
       <p:sp>
         <p:nvSpPr>
-          <p:cNvPr id="19" name="TextBox 18"/>
+          <p:cNvPr id="20" name="TextBox 19"/>
           <p:cNvSpPr txBox="1"/>
           <p:nvPr/>
         </p:nvSpPr>
@@ -5608,7 +5678,7 @@
       </p:sp>
       <p:sp>
         <p:nvSpPr>
-          <p:cNvPr id="20" name="Rectangle 19"/>
+          <p:cNvPr id="21" name="Rectangle 20"/>
           <p:cNvSpPr/>
           <p:nvPr/>
         </p:nvSpPr>
@@ -5652,7 +5722,7 @@
       </p:sp>
       <p:sp>
         <p:nvSpPr>
-          <p:cNvPr id="21" name="Rectangle 20"/>
+          <p:cNvPr id="22" name="Rectangle 21"/>
           <p:cNvSpPr/>
           <p:nvPr/>
         </p:nvSpPr>
@@ -5696,7 +5766,7 @@
       </p:sp>
       <p:sp>
         <p:nvSpPr>
-          <p:cNvPr id="22" name="TextBox 21"/>
+          <p:cNvPr id="23" name="TextBox 22"/>
           <p:cNvSpPr txBox="1"/>
           <p:nvPr/>
         </p:nvSpPr>
@@ -5731,7 +5801,7 @@
       </p:sp>
       <p:sp>
         <p:nvSpPr>
-          <p:cNvPr id="23" name="TextBox 22"/>
+          <p:cNvPr id="24" name="TextBox 23"/>
           <p:cNvSpPr txBox="1"/>
           <p:nvPr/>
         </p:nvSpPr>
@@ -5766,7 +5836,7 @@
       </p:sp>
       <p:sp>
         <p:nvSpPr>
-          <p:cNvPr id="24" name="Rectangle 23"/>
+          <p:cNvPr id="25" name="Rectangle 24"/>
           <p:cNvSpPr/>
           <p:nvPr/>
         </p:nvSpPr>
@@ -5810,7 +5880,7 @@
       </p:sp>
       <p:sp>
         <p:nvSpPr>
-          <p:cNvPr id="25" name="Rectangle 24"/>
+          <p:cNvPr id="26" name="Rectangle 25"/>
           <p:cNvSpPr/>
           <p:nvPr/>
         </p:nvSpPr>
@@ -5854,7 +5924,7 @@
       </p:sp>
       <p:sp>
         <p:nvSpPr>
-          <p:cNvPr id="26" name="TextBox 25"/>
+          <p:cNvPr id="27" name="TextBox 26"/>
           <p:cNvSpPr txBox="1"/>
           <p:nvPr/>
         </p:nvSpPr>
@@ -5889,7 +5959,7 @@
       </p:sp>
       <p:sp>
         <p:nvSpPr>
-          <p:cNvPr id="27" name="TextBox 26"/>
+          <p:cNvPr id="28" name="TextBox 27"/>
           <p:cNvSpPr txBox="1"/>
           <p:nvPr/>
         </p:nvSpPr>
@@ -5924,7 +5994,7 @@
       </p:sp>
       <p:sp>
         <p:nvSpPr>
-          <p:cNvPr id="28" name="Rectangle 27"/>
+          <p:cNvPr id="29" name="Rectangle 28"/>
           <p:cNvSpPr/>
           <p:nvPr/>
         </p:nvSpPr>
@@ -5968,7 +6038,7 @@
       </p:sp>
       <p:sp>
         <p:nvSpPr>
-          <p:cNvPr id="29" name="Rectangle 28"/>
+          <p:cNvPr id="30" name="Rectangle 29"/>
           <p:cNvSpPr/>
           <p:nvPr/>
         </p:nvSpPr>
@@ -6012,7 +6082,7 @@
       </p:sp>
       <p:sp>
         <p:nvSpPr>
-          <p:cNvPr id="30" name="TextBox 29"/>
+          <p:cNvPr id="31" name="TextBox 30"/>
           <p:cNvSpPr txBox="1"/>
           <p:nvPr/>
         </p:nvSpPr>
@@ -6174,8 +6244,8 @@
         </p:nvSpPr>
         <p:spPr>
           <a:xfrm>
-            <a:off x="10817352" y="6217920"/>
-            <a:ext cx="914400" cy="365760"/>
+            <a:off x="457200" y="6217920"/>
+            <a:ext cx="8531352" cy="365760"/>
           </a:xfrm>
           <a:prstGeom prst="rect">
             <a:avLst/>
@@ -6188,6 +6258,41 @@
           </a:bodyPr>
           <a:lstStyle/>
           <a:p>
+            <a:pPr algn="l"/>
+            <a:r>
+              <a:rPr sz="1000" b="0" i="0">
+                <a:solidFill>
+                  <a:srgbClr val="7F7F7F"/>
+                </a:solidFill>
+                <a:latin typeface="Arial"/>
+              </a:rPr>
+              <a:t>Uso interno</a:t>
+            </a:r>
+          </a:p>
+        </p:txBody>
+      </p:sp>
+      <p:sp>
+        <p:nvSpPr>
+          <p:cNvPr id="6" name="TextBox 5"/>
+          <p:cNvSpPr txBox="1"/>
+          <p:nvPr/>
+        </p:nvSpPr>
+        <p:spPr>
+          <a:xfrm>
+            <a:off x="10817352" y="6217920"/>
+            <a:ext cx="914400" cy="365760"/>
+          </a:xfrm>
+          <a:prstGeom prst="rect">
+            <a:avLst/>
+          </a:prstGeom>
+          <a:noFill/>
+        </p:spPr>
+        <p:txBody>
+          <a:bodyPr wrap="square" anchor="ctr" lIns="45720" rIns="45720" tIns="27432" bIns="27432">
+            <a:spAutoFit/>
+          </a:bodyPr>
+          <a:lstStyle/>
+          <a:p>
             <a:pPr algn="r"/>
             <a:r>
               <a:rPr sz="1000" b="0" i="0">
@@ -6203,7 +6308,7 @@
       </p:sp>
       <p:sp>
         <p:nvSpPr>
-          <p:cNvPr id="6" name="TextBox 5"/>
+          <p:cNvPr id="7" name="TextBox 6"/>
           <p:cNvSpPr txBox="1"/>
           <p:nvPr/>
         </p:nvSpPr>
@@ -6238,7 +6343,7 @@
       </p:sp>
       <p:sp>
         <p:nvSpPr>
-          <p:cNvPr id="7" name="Rectangle 6"/>
+          <p:cNvPr id="8" name="Rectangle 7"/>
           <p:cNvSpPr/>
           <p:nvPr/>
         </p:nvSpPr>
@@ -6282,7 +6387,7 @@
       </p:sp>
       <p:sp>
         <p:nvSpPr>
-          <p:cNvPr id="8" name="Rectangle 7"/>
+          <p:cNvPr id="9" name="Rectangle 8"/>
           <p:cNvSpPr/>
           <p:nvPr/>
         </p:nvSpPr>
@@ -6326,7 +6431,7 @@
       </p:sp>
       <p:sp>
         <p:nvSpPr>
-          <p:cNvPr id="9" name="TextBox 8"/>
+          <p:cNvPr id="10" name="TextBox 9"/>
           <p:cNvSpPr txBox="1"/>
           <p:nvPr/>
         </p:nvSpPr>
@@ -6361,7 +6466,7 @@
       </p:sp>
       <p:sp>
         <p:nvSpPr>
-          <p:cNvPr id="10" name="TextBox 9"/>
+          <p:cNvPr id="11" name="TextBox 10"/>
           <p:cNvSpPr txBox="1"/>
           <p:nvPr/>
         </p:nvSpPr>
@@ -6396,7 +6501,7 @@
       </p:sp>
       <p:sp>
         <p:nvSpPr>
-          <p:cNvPr id="11" name="Rectangle 10"/>
+          <p:cNvPr id="12" name="Rectangle 11"/>
           <p:cNvSpPr/>
           <p:nvPr/>
         </p:nvSpPr>
@@ -6440,7 +6545,7 @@
       </p:sp>
       <p:sp>
         <p:nvSpPr>
-          <p:cNvPr id="12" name="Rectangle 11"/>
+          <p:cNvPr id="13" name="Rectangle 12"/>
           <p:cNvSpPr/>
           <p:nvPr/>
         </p:nvSpPr>
@@ -6484,7 +6589,7 @@
       </p:sp>
       <p:sp>
         <p:nvSpPr>
-          <p:cNvPr id="13" name="TextBox 12"/>
+          <p:cNvPr id="14" name="TextBox 13"/>
           <p:cNvSpPr txBox="1"/>
           <p:nvPr/>
         </p:nvSpPr>
@@ -6519,7 +6624,7 @@
       </p:sp>
       <p:sp>
         <p:nvSpPr>
-          <p:cNvPr id="14" name="TextBox 13"/>
+          <p:cNvPr id="15" name="TextBox 14"/>
           <p:cNvSpPr txBox="1"/>
           <p:nvPr/>
         </p:nvSpPr>
@@ -6554,7 +6659,7 @@
       </p:sp>
       <p:sp>
         <p:nvSpPr>
-          <p:cNvPr id="15" name="Rectangle 14"/>
+          <p:cNvPr id="16" name="Rectangle 15"/>
           <p:cNvSpPr/>
           <p:nvPr/>
         </p:nvSpPr>
@@ -6598,7 +6703,7 @@
       </p:sp>
       <p:sp>
         <p:nvSpPr>
-          <p:cNvPr id="16" name="Rectangle 15"/>
+          <p:cNvPr id="17" name="Rectangle 16"/>
           <p:cNvSpPr/>
           <p:nvPr/>
         </p:nvSpPr>
@@ -6642,7 +6747,7 @@
       </p:sp>
       <p:sp>
         <p:nvSpPr>
-          <p:cNvPr id="17" name="TextBox 16"/>
+          <p:cNvPr id="18" name="TextBox 17"/>
           <p:cNvSpPr txBox="1"/>
           <p:nvPr/>
         </p:nvSpPr>
@@ -6677,7 +6782,7 @@
       </p:sp>
       <p:sp>
         <p:nvSpPr>
-          <p:cNvPr id="18" name="TextBox 17"/>
+          <p:cNvPr id="19" name="TextBox 18"/>
           <p:cNvSpPr txBox="1"/>
           <p:nvPr/>
         </p:nvSpPr>
@@ -6712,7 +6817,7 @@
       </p:sp>
       <p:sp>
         <p:nvSpPr>
-          <p:cNvPr id="19" name="TextBox 18"/>
+          <p:cNvPr id="20" name="TextBox 19"/>
           <p:cNvSpPr txBox="1"/>
           <p:nvPr/>
         </p:nvSpPr>
@@ -6747,7 +6852,7 @@
       </p:sp>
       <p:sp>
         <p:nvSpPr>
-          <p:cNvPr id="20" name="Rectangle 19"/>
+          <p:cNvPr id="21" name="Rectangle 20"/>
           <p:cNvSpPr/>
           <p:nvPr/>
         </p:nvSpPr>
@@ -6791,7 +6896,7 @@
       </p:sp>
       <p:sp>
         <p:nvSpPr>
-          <p:cNvPr id="21" name="Rectangle 20"/>
+          <p:cNvPr id="22" name="Rectangle 21"/>
           <p:cNvSpPr/>
           <p:nvPr/>
         </p:nvSpPr>
@@ -6835,7 +6940,7 @@
       </p:sp>
       <p:sp>
         <p:nvSpPr>
-          <p:cNvPr id="22" name="TextBox 21"/>
+          <p:cNvPr id="23" name="TextBox 22"/>
           <p:cNvSpPr txBox="1"/>
           <p:nvPr/>
         </p:nvSpPr>
@@ -6870,7 +6975,7 @@
       </p:sp>
       <p:sp>
         <p:nvSpPr>
-          <p:cNvPr id="23" name="TextBox 22"/>
+          <p:cNvPr id="24" name="TextBox 23"/>
           <p:cNvSpPr txBox="1"/>
           <p:nvPr/>
         </p:nvSpPr>
@@ -6905,7 +7010,7 @@
       </p:sp>
       <p:sp>
         <p:nvSpPr>
-          <p:cNvPr id="24" name="Rectangle 23"/>
+          <p:cNvPr id="25" name="Rectangle 24"/>
           <p:cNvSpPr/>
           <p:nvPr/>
         </p:nvSpPr>
@@ -6949,7 +7054,7 @@
       </p:sp>
       <p:sp>
         <p:nvSpPr>
-          <p:cNvPr id="25" name="Rectangle 24"/>
+          <p:cNvPr id="26" name="Rectangle 25"/>
           <p:cNvSpPr/>
           <p:nvPr/>
         </p:nvSpPr>
@@ -6993,7 +7098,7 @@
       </p:sp>
       <p:sp>
         <p:nvSpPr>
-          <p:cNvPr id="26" name="TextBox 25"/>
+          <p:cNvPr id="27" name="TextBox 26"/>
           <p:cNvSpPr txBox="1"/>
           <p:nvPr/>
         </p:nvSpPr>
@@ -7028,7 +7133,7 @@
       </p:sp>
       <p:sp>
         <p:nvSpPr>
-          <p:cNvPr id="27" name="TextBox 26"/>
+          <p:cNvPr id="28" name="TextBox 27"/>
           <p:cNvSpPr txBox="1"/>
           <p:nvPr/>
         </p:nvSpPr>
@@ -7063,7 +7168,7 @@
       </p:sp>
       <p:sp>
         <p:nvSpPr>
-          <p:cNvPr id="28" name="TextBox 27"/>
+          <p:cNvPr id="29" name="TextBox 28"/>
           <p:cNvSpPr txBox="1"/>
           <p:nvPr/>
         </p:nvSpPr>
@@ -7247,7 +7352,7 @@
                 </a:solidFill>
                 <a:latin typeface="Arial"/>
               </a:rPr>
-              <a:t>Fonte: Base de portfólio; critério: risco alto + desvio financeiro ou em espera</a:t>
+              <a:t>Fonte: Base de portfólio; critério: risco alto + desvio financeiro ou em espera   |   Uso interno</a:t>
             </a:r>
           </a:p>
         </p:txBody>
@@ -8501,7 +8606,7 @@
                 </a:solidFill>
                 <a:latin typeface="Arial"/>
               </a:rPr>
-              <a:t>Fonte: Próximo marco por projeto</a:t>
+              <a:t>Fonte: Próximo marco por projeto   |   Uso interno</a:t>
             </a:r>
           </a:p>
         </p:txBody>
@@ -8736,7 +8841,7 @@
       </p:sp>
       <p:graphicFrame>
         <p:nvGraphicFramePr>
-          <p:cNvPr id="12" name="Chart 11"/>
+          <p:cNvPr id="12" name="Chart 11" descr="15 marcos estão concentrados no último trimestre do ano"/>
           <p:cNvGraphicFramePr>
             <a:graphicFrameLocks noGrp="1"/>
           </p:cNvGraphicFramePr>
